--- a/03_product/concepts/AI-Class-Plus-concept-1.2-slide-deck-product-dev-2026-09-04-final.pptx
+++ b/03_product/concepts/AI-Class-Plus-concept-1.2-slide-deck-product-dev-2026-09-04-final.pptx
@@ -10457,7 +10457,7 @@
                           <a:cs typeface="Arial"/>
                           <a:sym typeface="Arial"/>
                         </a:rPr>
-                        <a:t>+ AI Tutor (kèm riêng 30 phút cuối buổi)</a:t>
+                        <a:t>+ AI Tutor (kèm riêng 30 phút sau mỗi buổi)</a:t>
                       </a:r>
                       <a:endParaRPr sz="1200" u="none" cap="none" strike="noStrike">
                         <a:latin typeface="Arial"/>
@@ -10541,7 +10541,7 @@
                           <a:cs typeface="Arial"/>
                           <a:sym typeface="Arial"/>
                         </a:rPr>
-                        <a:t>30 phút cuối mỗi buổi Big Class Plus</a:t>
+                        <a:t>30 phút sau mỗi buổi Big Class Plus — mặc định cho mọi học sinh</a:t>
                       </a:r>
                       <a:endParaRPr sz="1200" u="none" cap="none" strike="noStrike">
                         <a:latin typeface="Arial"/>
@@ -10625,7 +10625,7 @@
                           <a:cs typeface="Arial"/>
                           <a:sym typeface="Arial"/>
                         </a:rPr>
-                        <a:t>Gia sư AI kèm 1-1 vá đúng lỗ hổng NLO vừa phát hiện; trợ giảng AI tổng kết buổi và giao BTVN Adaptive tương ứng.</a:t>
+                        <a:t>Gia sư AI kèm 1-1, phân theo chân dung: Khá giỏi → nâng cao, mở rộng kiến thức; Trung bình/yếu → vá lỗ hổng NLO vừa phát hiện, củng cố kiến thức vừa học. Trợ giảng AI tổng kết buổi và giao BTVN Adaptive tương ứng.</a:t>
                       </a:r>
                       <a:endParaRPr sz="1200" u="none" cap="none" strike="noStrike">
                         <a:latin typeface="Arial"/>
@@ -14835,7 +14835,7 @@
                 <a:cs typeface="Arial"/>
                 <a:sym typeface="Arial"/>
               </a:rPr>
-              <a:t>Thành phần 3: Kèm riêng 30 phút cuối buổi (AI Tutor)</a:t>
+              <a:t>Thành phần 3: Kèm riêng 30 phút sau buổi học (AI Tutor)</a:t>
             </a:r>
             <a:endParaRPr b="0" i="0" sz="2200" u="none" cap="none" strike="noStrike">
               <a:solidFill>
@@ -15071,7 +15071,7 @@
                 <a:cs typeface="Arial"/>
                 <a:sym typeface="Arial"/>
               </a:rPr>
-              <a:t>Gia sư AI kèm 1-1 trong 30 phút cuối mỗi buổi Big Class Plus, vá đúng lỗ hổng NLO vừa phát hiện trong buổi học; đồng thời trợ giảng AI tổng kết cuối buổi và giao bài tập về nhà.</a:t>
+              <a:t>Gia sư AI kèm 1-1 trong 30 phút sau mỗi buổi Big Class Plus — mặc định cho mọi học sinh, chia theo chân dung: nâng cao cho học sinh khá giỏi, vá lỗ hổng cho học sinh trung bình/yếu; đồng thời trợ giảng AI tổng kết buổi và giao bài tập về nhà.</a:t>
             </a:r>
             <a:endParaRPr b="0" i="0" sz="1250" u="none" cap="none" strike="noStrike">
               <a:solidFill>
@@ -15333,7 +15333,7 @@
                 <a:cs typeface="Arial"/>
                 <a:sym typeface="Arial"/>
               </a:rPr>
-              <a:t>Kích hoạt khi Gap Detection phát hiện học sinh chưa theo kịp nội dung buổi học (NLO chưa đạt).</a:t>
+              <a:t>Mặc định diễn ra sau mỗi buổi Big Class Plus cho toàn bộ học sinh — không phải tính năng chỉ kích hoạt khi có lỗ hổng.</a:t>
             </a:r>
             <a:endParaRPr b="0" i="0" sz="1200" u="none" cap="none" strike="noStrike">
               <a:solidFill>
@@ -15373,7 +15373,7 @@
                 <a:cs typeface="Arial"/>
                 <a:sym typeface="Arial"/>
               </a:rPr>
-              <a:t>Dạy 1-1 tập trung đúng NLO vừa hổng — không dạy lại toàn bộ nội dung buổi học.</a:t>
+              <a:t>Phân luồng theo chân dung học sinh: Khá giỏi → nâng cao, mở rộng kiến thức ngoài nội dung vừa học; Trung bình/yếu → tập trung đúng NLO vừa hổng để củng cố, không dạy lại toàn bộ nội dung buổi học.</a:t>
             </a:r>
             <a:endParaRPr b="0" i="0" sz="1200" u="none" cap="none" strike="noStrike">
               <a:solidFill>
@@ -28043,7 +28043,7 @@
                 <a:cs typeface="Arial"/>
                 <a:sym typeface="Arial"/>
               </a:rPr>
-              <a:t> "Chương trình tiếng Anh trực tuyến có giáo viên thật, cộng thêm gia sư AI kèm riêng 30 phút sau mỗi buổi vá đúng lỗ hổng của con theo 1.473 đơn vị kiến thức — và một bản đồ tiến bộ phụ huynh đọc được, khớp chuẩn nhà trường."</a:t>
+              <a:t> "Chương trình tiếng Anh trực tuyến có giáo viên thật, cộng thêm gia sư AI kèm riêng 30 phút sau mỗi buổi — vá lỗ hổng hoặc nâng cao mở rộng tuỳ năng lực của con — theo 1.473 đơn vị kiến thức, và một bản đồ tiến bộ phụ huynh đọc được, khớp chuẩn nhà trường."</a:t>
             </a:r>
             <a:endParaRPr b="0" i="1" sz="1400" u="none" cap="none" strike="noStrike">
               <a:solidFill>
